--- a/presentations/b17-ai-identity/B17_AI_Identity_Narrated.pptx
+++ b/presentations/b17-ai-identity/B17_AI_Identity_Narrated.pptx
@@ -187,7 +187,7 @@
     </p:spTree>
     <p:extLst>
       <p:ext uri="{BB962C8B-B14F-4D97-AF65-F5344CB8AC3E}">
-        <p14:creationId xmlns:p14="http://schemas.microsoft.com/office/powerpoint/2010/main" val="1081284984"/>
+        <p14:creationId xmlns:p14="http://schemas.microsoft.com/office/powerpoint/2010/main" val="2787209608"/>
       </p:ext>
     </p:extLst>
   </p:cSld>
@@ -2517,7 +2517,7 @@
             <a:hlinkClick r:id="" action="ppaction://media"/>
             <a:extLst>
               <a:ext uri="{FF2B5EF4-FFF2-40B4-BE49-F238E27FC236}">
-                <a16:creationId xmlns:a16="http://schemas.microsoft.com/office/drawing/2014/main" id="{C09CB890-1EEF-5B87-6A2A-87B334494478}"/>
+                <a16:creationId xmlns:a16="http://schemas.microsoft.com/office/drawing/2014/main" id="{C74C44A4-A7E8-A6D7-710E-A9CC198BFE46}"/>
               </a:ext>
             </a:extLst>
           </p:cNvPr>
@@ -2533,7 +2533,7 @@
                     <p:ext uri="{3AFAAA56-56D3-431D-BCD4-E75A35582382}">
                       <p173:tracksInfo xmlns:p173="http://schemas.microsoft.com/office/powerpoint/2017/3/main" displayLoc="slide">
                         <p173:trackLst>
-                          <p173:track id="{4342F26B-3FFB-476E-AF5E-C61505745251}" label="English (captions)" lang="en-US" r:embed="rId6"/>
+                          <p173:track id="{6589232A-F3B2-4966-BBA8-019BE6637C54}" label="English (captions)" lang="en-US" r:embed="rId6"/>
                         </p173:trackLst>
                       </p173:tracksInfo>
                     </p:ext>
@@ -2551,7 +2551,7 @@
         </p:blipFill>
         <p:spPr>
           <a:xfrm>
-            <a:off x="127000" y="6350000"/>
+            <a:off x="12446000" y="127000"/>
             <a:ext cx="304800" cy="304800"/>
           </a:xfrm>
           <a:prstGeom prst="rect">
@@ -3624,7 +3624,7 @@
             <a:hlinkClick r:id="" action="ppaction://media"/>
             <a:extLst>
               <a:ext uri="{FF2B5EF4-FFF2-40B4-BE49-F238E27FC236}">
-                <a16:creationId xmlns:a16="http://schemas.microsoft.com/office/drawing/2014/main" id="{C0B43F78-5D09-6C04-BC77-87CA63F49C6B}"/>
+                <a16:creationId xmlns:a16="http://schemas.microsoft.com/office/drawing/2014/main" id="{2EF68BB5-192D-A933-5B99-D73113D543F1}"/>
               </a:ext>
             </a:extLst>
           </p:cNvPr>
@@ -3640,7 +3640,7 @@
                     <p:ext uri="{3AFAAA56-56D3-431D-BCD4-E75A35582382}">
                       <p173:tracksInfo xmlns:p173="http://schemas.microsoft.com/office/powerpoint/2017/3/main" displayLoc="slide">
                         <p173:trackLst>
-                          <p173:track id="{60873F89-F510-4A3E-AE79-31882E378691}" label="English (captions)" lang="en-US" r:embed="rId8"/>
+                          <p173:track id="{70816A1E-75DB-4C6C-B685-EE7D638EB81A}" label="English (captions)" lang="en-US" r:embed="rId8"/>
                         </p173:trackLst>
                       </p173:tracksInfo>
                     </p:ext>
@@ -3658,7 +3658,7 @@
         </p:blipFill>
         <p:spPr>
           <a:xfrm>
-            <a:off x="127000" y="6350000"/>
+            <a:off x="12446000" y="127000"/>
             <a:ext cx="304800" cy="304800"/>
           </a:xfrm>
           <a:prstGeom prst="rect">
@@ -5046,7 +5046,7 @@
             <a:hlinkClick r:id="" action="ppaction://media"/>
             <a:extLst>
               <a:ext uri="{FF2B5EF4-FFF2-40B4-BE49-F238E27FC236}">
-                <a16:creationId xmlns:a16="http://schemas.microsoft.com/office/drawing/2014/main" id="{5069E785-76DE-4076-C8D5-84A5B9AF0526}"/>
+                <a16:creationId xmlns:a16="http://schemas.microsoft.com/office/drawing/2014/main" id="{7B438BAF-A2A3-C913-1878-D50D0BA192DF}"/>
               </a:ext>
             </a:extLst>
           </p:cNvPr>
@@ -5062,7 +5062,7 @@
                     <p:ext uri="{3AFAAA56-56D3-431D-BCD4-E75A35582382}">
                       <p173:tracksInfo xmlns:p173="http://schemas.microsoft.com/office/powerpoint/2017/3/main" displayLoc="slide">
                         <p173:trackLst>
-                          <p173:track id="{2FD1F552-FC1F-4414-83CD-A5049335E9D0}" label="English (captions)" lang="en-US" r:embed="rId9"/>
+                          <p173:track id="{9536361A-111E-49D3-AF49-C2A14218D41A}" label="English (captions)" lang="en-US" r:embed="rId9"/>
                         </p173:trackLst>
                       </p173:tracksInfo>
                     </p:ext>
@@ -5080,7 +5080,7 @@
         </p:blipFill>
         <p:spPr>
           <a:xfrm>
-            <a:off x="127000" y="6350000"/>
+            <a:off x="12446000" y="127000"/>
             <a:ext cx="304800" cy="304800"/>
           </a:xfrm>
           <a:prstGeom prst="rect">
@@ -6500,7 +6500,7 @@
             <a:hlinkClick r:id="" action="ppaction://media"/>
             <a:extLst>
               <a:ext uri="{FF2B5EF4-FFF2-40B4-BE49-F238E27FC236}">
-                <a16:creationId xmlns:a16="http://schemas.microsoft.com/office/drawing/2014/main" id="{4CF69645-3D16-5669-7711-8B52E2BC50CD}"/>
+                <a16:creationId xmlns:a16="http://schemas.microsoft.com/office/drawing/2014/main" id="{2D1D2FAE-9427-6F5A-A067-251AD9CB5F18}"/>
               </a:ext>
             </a:extLst>
           </p:cNvPr>
@@ -6516,7 +6516,7 @@
                     <p:ext uri="{3AFAAA56-56D3-431D-BCD4-E75A35582382}">
                       <p173:tracksInfo xmlns:p173="http://schemas.microsoft.com/office/powerpoint/2017/3/main" displayLoc="slide">
                         <p173:trackLst>
-                          <p173:track id="{4DAB364F-E923-47D5-8582-53C02E881AB7}" label="English (captions)" lang="en-US" r:embed="rId9"/>
+                          <p173:track id="{1F61329D-F3F7-40FB-AE40-B67971DC9AB9}" label="English (captions)" lang="en-US" r:embed="rId9"/>
                         </p173:trackLst>
                       </p173:tracksInfo>
                     </p:ext>
@@ -6534,7 +6534,7 @@
         </p:blipFill>
         <p:spPr>
           <a:xfrm>
-            <a:off x="127000" y="6350000"/>
+            <a:off x="12446000" y="127000"/>
             <a:ext cx="304800" cy="304800"/>
           </a:xfrm>
           <a:prstGeom prst="rect">
@@ -8536,7 +8536,7 @@
             <a:hlinkClick r:id="" action="ppaction://media"/>
             <a:extLst>
               <a:ext uri="{FF2B5EF4-FFF2-40B4-BE49-F238E27FC236}">
-                <a16:creationId xmlns:a16="http://schemas.microsoft.com/office/drawing/2014/main" id="{0B916CAC-C054-800A-F239-51C43E35D268}"/>
+                <a16:creationId xmlns:a16="http://schemas.microsoft.com/office/drawing/2014/main" id="{C7FC0CFF-63CC-873E-9C9A-141417DCA41D}"/>
               </a:ext>
             </a:extLst>
           </p:cNvPr>
@@ -8552,7 +8552,7 @@
                     <p:ext uri="{3AFAAA56-56D3-431D-BCD4-E75A35582382}">
                       <p173:tracksInfo xmlns:p173="http://schemas.microsoft.com/office/powerpoint/2017/3/main" displayLoc="slide">
                         <p173:trackLst>
-                          <p173:track id="{02182E2A-E50D-4F75-AB13-72F9A3AA3C2E}" label="English (captions)" lang="en-US" r:embed="rId8"/>
+                          <p173:track id="{58DD24AD-B119-42CD-91A5-6698017A0FEB}" label="English (captions)" lang="en-US" r:embed="rId8"/>
                         </p173:trackLst>
                       </p173:tracksInfo>
                     </p:ext>
@@ -8570,7 +8570,7 @@
         </p:blipFill>
         <p:spPr>
           <a:xfrm>
-            <a:off x="127000" y="6350000"/>
+            <a:off x="12446000" y="127000"/>
             <a:ext cx="304800" cy="304800"/>
           </a:xfrm>
           <a:prstGeom prst="rect">
@@ -9639,7 +9639,7 @@
             <a:hlinkClick r:id="" action="ppaction://media"/>
             <a:extLst>
               <a:ext uri="{FF2B5EF4-FFF2-40B4-BE49-F238E27FC236}">
-                <a16:creationId xmlns:a16="http://schemas.microsoft.com/office/drawing/2014/main" id="{4B206E05-2A9A-4E2C-3EBB-8C3DA5BC64C1}"/>
+                <a16:creationId xmlns:a16="http://schemas.microsoft.com/office/drawing/2014/main" id="{A97BEB3A-2BD0-E6D0-83EC-A48D0689B7E6}"/>
               </a:ext>
             </a:extLst>
           </p:cNvPr>
@@ -9655,7 +9655,7 @@
                     <p:ext uri="{3AFAAA56-56D3-431D-BCD4-E75A35582382}">
                       <p173:tracksInfo xmlns:p173="http://schemas.microsoft.com/office/powerpoint/2017/3/main" displayLoc="slide">
                         <p173:trackLst>
-                          <p173:track id="{C4CC59EE-6042-4F47-928B-C5522FF450D5}" label="English (captions)" lang="en-US" r:embed="rId11"/>
+                          <p173:track id="{1D631218-B122-452B-8F11-CA420A44A545}" label="English (captions)" lang="en-US" r:embed="rId11"/>
                         </p173:trackLst>
                       </p173:tracksInfo>
                     </p:ext>
@@ -9673,7 +9673,7 @@
         </p:blipFill>
         <p:spPr>
           <a:xfrm>
-            <a:off x="127000" y="6350000"/>
+            <a:off x="12446000" y="127000"/>
             <a:ext cx="304800" cy="304800"/>
           </a:xfrm>
           <a:prstGeom prst="rect">
@@ -10728,7 +10728,7 @@
             <a:hlinkClick r:id="" action="ppaction://media"/>
             <a:extLst>
               <a:ext uri="{FF2B5EF4-FFF2-40B4-BE49-F238E27FC236}">
-                <a16:creationId xmlns:a16="http://schemas.microsoft.com/office/drawing/2014/main" id="{F0B2BE72-D112-6CE8-8855-DA416CE73285}"/>
+                <a16:creationId xmlns:a16="http://schemas.microsoft.com/office/drawing/2014/main" id="{23D35D95-D515-9B9D-A4C8-977D71B4462F}"/>
               </a:ext>
             </a:extLst>
           </p:cNvPr>
@@ -10744,7 +10744,7 @@
                     <p:ext uri="{3AFAAA56-56D3-431D-BCD4-E75A35582382}">
                       <p173:tracksInfo xmlns:p173="http://schemas.microsoft.com/office/powerpoint/2017/3/main" displayLoc="slide">
                         <p173:trackLst>
-                          <p173:track id="{EC20D07A-2D0F-4BA0-879F-28B5E6F27186}" label="English (captions)" lang="en-US" r:embed="rId8"/>
+                          <p173:track id="{215C602D-A7E4-4A8A-9018-9E93F2EF37A5}" label="English (captions)" lang="en-US" r:embed="rId8"/>
                         </p173:trackLst>
                       </p173:tracksInfo>
                     </p:ext>
@@ -10762,7 +10762,7 @@
         </p:blipFill>
         <p:spPr>
           <a:xfrm>
-            <a:off x="127000" y="6350000"/>
+            <a:off x="12446000" y="127000"/>
             <a:ext cx="304800" cy="304800"/>
           </a:xfrm>
           <a:prstGeom prst="rect">
@@ -11711,7 +11711,7 @@
             <a:hlinkClick r:id="" action="ppaction://media"/>
             <a:extLst>
               <a:ext uri="{FF2B5EF4-FFF2-40B4-BE49-F238E27FC236}">
-                <a16:creationId xmlns:a16="http://schemas.microsoft.com/office/drawing/2014/main" id="{A6B61262-9A72-3B1E-518D-30F2848BAD10}"/>
+                <a16:creationId xmlns:a16="http://schemas.microsoft.com/office/drawing/2014/main" id="{58010A12-9198-3CAF-9D37-FA14B2B4C759}"/>
               </a:ext>
             </a:extLst>
           </p:cNvPr>
@@ -11727,7 +11727,7 @@
                     <p:ext uri="{3AFAAA56-56D3-431D-BCD4-E75A35582382}">
                       <p173:tracksInfo xmlns:p173="http://schemas.microsoft.com/office/powerpoint/2017/3/main" displayLoc="slide">
                         <p173:trackLst>
-                          <p173:track id="{307485D1-6478-4C72-81FF-6F1529B760E8}" label="English (captions)" lang="en-US" r:embed="rId9"/>
+                          <p173:track id="{DDCEBB16-EA82-4C2C-9B4E-5030C130B558}" label="English (captions)" lang="en-US" r:embed="rId9"/>
                         </p173:trackLst>
                       </p173:tracksInfo>
                     </p:ext>
@@ -11745,7 +11745,7 @@
         </p:blipFill>
         <p:spPr>
           <a:xfrm>
-            <a:off x="127000" y="6350000"/>
+            <a:off x="12446000" y="127000"/>
             <a:ext cx="304800" cy="304800"/>
           </a:xfrm>
           <a:prstGeom prst="rect">
@@ -13332,7 +13332,7 @@
             <a:hlinkClick r:id="" action="ppaction://media"/>
             <a:extLst>
               <a:ext uri="{FF2B5EF4-FFF2-40B4-BE49-F238E27FC236}">
-                <a16:creationId xmlns:a16="http://schemas.microsoft.com/office/drawing/2014/main" id="{ABB1B352-64F5-26B2-7E23-65DF727A9BAA}"/>
+                <a16:creationId xmlns:a16="http://schemas.microsoft.com/office/drawing/2014/main" id="{B67D4B49-DFEC-4BCF-793D-F2315DE48C1C}"/>
               </a:ext>
             </a:extLst>
           </p:cNvPr>
@@ -13348,7 +13348,7 @@
                     <p:ext uri="{3AFAAA56-56D3-431D-BCD4-E75A35582382}">
                       <p173:tracksInfo xmlns:p173="http://schemas.microsoft.com/office/powerpoint/2017/3/main" displayLoc="slide">
                         <p173:trackLst>
-                          <p173:track id="{CDA05F54-5CFE-4B1D-B737-AAF040C36E7B}" label="English (captions)" lang="en-US" r:embed="rId8"/>
+                          <p173:track id="{87F4201E-1C5A-487D-9A2D-C643F0C21466}" label="English (captions)" lang="en-US" r:embed="rId8"/>
                         </p173:trackLst>
                       </p173:tracksInfo>
                     </p:ext>
@@ -13366,7 +13366,7 @@
         </p:blipFill>
         <p:spPr>
           <a:xfrm>
-            <a:off x="127000" y="6350000"/>
+            <a:off x="12446000" y="127000"/>
             <a:ext cx="304800" cy="304800"/>
           </a:xfrm>
           <a:prstGeom prst="rect">
@@ -14509,7 +14509,7 @@
             <a:hlinkClick r:id="" action="ppaction://media"/>
             <a:extLst>
               <a:ext uri="{FF2B5EF4-FFF2-40B4-BE49-F238E27FC236}">
-                <a16:creationId xmlns:a16="http://schemas.microsoft.com/office/drawing/2014/main" id="{5569EECE-D627-37A5-3ACC-C8D62139BEF7}"/>
+                <a16:creationId xmlns:a16="http://schemas.microsoft.com/office/drawing/2014/main" id="{70653CE9-05B3-D48F-041D-FEF24BB6196A}"/>
               </a:ext>
             </a:extLst>
           </p:cNvPr>
@@ -14525,7 +14525,7 @@
                     <p:ext uri="{3AFAAA56-56D3-431D-BCD4-E75A35582382}">
                       <p173:tracksInfo xmlns:p173="http://schemas.microsoft.com/office/powerpoint/2017/3/main" displayLoc="slide">
                         <p173:trackLst>
-                          <p173:track id="{E7F2EFC6-A3D4-41FA-8978-C21D20E5D72D}" label="English (captions)" lang="en-US" r:embed="rId10"/>
+                          <p173:track id="{83B44CA1-0F84-4DF2-BA5D-B51F084333F5}" label="English (captions)" lang="en-US" r:embed="rId10"/>
                         </p173:trackLst>
                       </p173:tracksInfo>
                     </p:ext>
@@ -14543,7 +14543,7 @@
         </p:blipFill>
         <p:spPr>
           <a:xfrm>
-            <a:off x="127000" y="6350000"/>
+            <a:off x="12446000" y="127000"/>
             <a:ext cx="304800" cy="304800"/>
           </a:xfrm>
           <a:prstGeom prst="rect">
@@ -16334,7 +16334,7 @@
             <a:hlinkClick r:id="" action="ppaction://media"/>
             <a:extLst>
               <a:ext uri="{FF2B5EF4-FFF2-40B4-BE49-F238E27FC236}">
-                <a16:creationId xmlns:a16="http://schemas.microsoft.com/office/drawing/2014/main" id="{5AD72C13-4252-1B5D-3592-075158337136}"/>
+                <a16:creationId xmlns:a16="http://schemas.microsoft.com/office/drawing/2014/main" id="{B34CACC6-D83E-C547-DFF9-C4A1BE7085FB}"/>
               </a:ext>
             </a:extLst>
           </p:cNvPr>
@@ -16350,7 +16350,7 @@
                     <p:ext uri="{3AFAAA56-56D3-431D-BCD4-E75A35582382}">
                       <p173:tracksInfo xmlns:p173="http://schemas.microsoft.com/office/powerpoint/2017/3/main" displayLoc="slide">
                         <p173:trackLst>
-                          <p173:track id="{5958A6C7-90C7-4244-91E6-39C10A875E3F}" label="English (captions)" lang="en-US" r:embed="rId8"/>
+                          <p173:track id="{0485F9EF-BA70-4C04-8A96-307DC0625D36}" label="English (captions)" lang="en-US" r:embed="rId8"/>
                         </p173:trackLst>
                       </p173:tracksInfo>
                     </p:ext>
@@ -16368,7 +16368,7 @@
         </p:blipFill>
         <p:spPr>
           <a:xfrm>
-            <a:off x="127000" y="6350000"/>
+            <a:off x="12446000" y="127000"/>
             <a:ext cx="304800" cy="304800"/>
           </a:xfrm>
           <a:prstGeom prst="rect">
@@ -18581,7 +18581,7 @@
             <a:hlinkClick r:id="" action="ppaction://media"/>
             <a:extLst>
               <a:ext uri="{FF2B5EF4-FFF2-40B4-BE49-F238E27FC236}">
-                <a16:creationId xmlns:a16="http://schemas.microsoft.com/office/drawing/2014/main" id="{FE194529-D635-3214-F01E-8CBB1ADC7359}"/>
+                <a16:creationId xmlns:a16="http://schemas.microsoft.com/office/drawing/2014/main" id="{D2786A5F-5ACE-46C6-D585-A3531D12EE5E}"/>
               </a:ext>
             </a:extLst>
           </p:cNvPr>
@@ -18597,7 +18597,7 @@
                     <p:ext uri="{3AFAAA56-56D3-431D-BCD4-E75A35582382}">
                       <p173:tracksInfo xmlns:p173="http://schemas.microsoft.com/office/powerpoint/2017/3/main" displayLoc="slide">
                         <p173:trackLst>
-                          <p173:track id="{7E4E65C4-582F-4370-8000-C97CD4E67713}" label="English (captions)" lang="en-US" r:embed="rId8"/>
+                          <p173:track id="{96EB512B-2AE9-4810-BAF3-2CC8F512FF4B}" label="English (captions)" lang="en-US" r:embed="rId8"/>
                         </p173:trackLst>
                       </p173:tracksInfo>
                     </p:ext>
@@ -18615,7 +18615,7 @@
         </p:blipFill>
         <p:spPr>
           <a:xfrm>
-            <a:off x="127000" y="6350000"/>
+            <a:off x="12446000" y="127000"/>
             <a:ext cx="304800" cy="304800"/>
           </a:xfrm>
           <a:prstGeom prst="rect">
@@ -19772,7 +19772,7 @@
             <a:hlinkClick r:id="" action="ppaction://media"/>
             <a:extLst>
               <a:ext uri="{FF2B5EF4-FFF2-40B4-BE49-F238E27FC236}">
-                <a16:creationId xmlns:a16="http://schemas.microsoft.com/office/drawing/2014/main" id="{A724FE7F-1383-1370-4544-E211FE94C471}"/>
+                <a16:creationId xmlns:a16="http://schemas.microsoft.com/office/drawing/2014/main" id="{369D96DA-2495-E0C4-8CF6-5D659AFD1F23}"/>
               </a:ext>
             </a:extLst>
           </p:cNvPr>
@@ -19788,7 +19788,7 @@
                     <p:ext uri="{3AFAAA56-56D3-431D-BCD4-E75A35582382}">
                       <p173:tracksInfo xmlns:p173="http://schemas.microsoft.com/office/powerpoint/2017/3/main" displayLoc="slide">
                         <p173:trackLst>
-                          <p173:track id="{D12AE130-D471-4BC6-AF87-17C9235DB013}" label="English (captions)" lang="en-US" r:embed="rId8"/>
+                          <p173:track id="{A88411C3-8954-4A8E-9B24-C354623664C0}" label="English (captions)" lang="en-US" r:embed="rId8"/>
                         </p173:trackLst>
                       </p173:tracksInfo>
                     </p:ext>
@@ -19806,7 +19806,7 @@
         </p:blipFill>
         <p:spPr>
           <a:xfrm>
-            <a:off x="127000" y="6350000"/>
+            <a:off x="12446000" y="127000"/>
             <a:ext cx="304800" cy="304800"/>
           </a:xfrm>
           <a:prstGeom prst="rect">
@@ -21119,7 +21119,7 @@
             <a:hlinkClick r:id="" action="ppaction://media"/>
             <a:extLst>
               <a:ext uri="{FF2B5EF4-FFF2-40B4-BE49-F238E27FC236}">
-                <a16:creationId xmlns:a16="http://schemas.microsoft.com/office/drawing/2014/main" id="{23FD188C-2303-FE62-BD25-31C7E941BC95}"/>
+                <a16:creationId xmlns:a16="http://schemas.microsoft.com/office/drawing/2014/main" id="{C096A9BB-059C-2BC2-2E15-A916D7F19C08}"/>
               </a:ext>
             </a:extLst>
           </p:cNvPr>
@@ -21135,7 +21135,7 @@
                     <p:ext uri="{3AFAAA56-56D3-431D-BCD4-E75A35582382}">
                       <p173:tracksInfo xmlns:p173="http://schemas.microsoft.com/office/powerpoint/2017/3/main" displayLoc="slide">
                         <p173:trackLst>
-                          <p173:track id="{1638C3D7-AC51-4274-B157-F7F7A51CCE80}" label="English (captions)" lang="en-US" r:embed="rId9"/>
+                          <p173:track id="{EC761FFC-4444-4BEE-AB1E-81AC78087525}" label="English (captions)" lang="en-US" r:embed="rId9"/>
                         </p173:trackLst>
                       </p173:tracksInfo>
                     </p:ext>
@@ -21153,7 +21153,7 @@
         </p:blipFill>
         <p:spPr>
           <a:xfrm>
-            <a:off x="127000" y="6350000"/>
+            <a:off x="12446000" y="127000"/>
             <a:ext cx="304800" cy="304800"/>
           </a:xfrm>
           <a:prstGeom prst="rect">
